--- a/2027/GEO330_Fall_Quarter/exercises/Exercise_02/slides/Exercise02_Template.pptx
+++ b/2027/GEO330_Fall_Quarter/exercises/Exercise_02/slides/Exercise02_Template.pptx
@@ -10,9 +10,9 @@
     <p:sldId id="273" r:id="rId7"/>
     <p:sldId id="274" r:id="rId8"/>
     <p:sldId id="275" r:id="rId9"/>
-    <p:sldId id="277" r:id="rId15"/>
-    <p:sldId id="278" r:id="rId16"/>
-    <p:sldId id="279" r:id="rId17"/>
+    <p:sldId id="277" r:id="rId10"/>
+    <p:sldId id="279" r:id="rId11"/>
+    <p:sldId id="278" r:id="rId12"/>
   </p:sldIdLst>
   <p:sldSz cx="12192000" cy="6858000"/>
   <p:notesSz cx="6858000" cy="9144000"/>
@@ -119,183 +119,141 @@
 </p:presentation>
 </file>
 
+<file path=ppt/revisionInfo.xml><?xml version="1.0" encoding="utf-8"?>
+<p1510:revInfo xmlns:a="http://schemas.openxmlformats.org/drawingml/2006/main" xmlns:r="http://schemas.openxmlformats.org/officeDocument/2006/relationships" xmlns:p1510="http://schemas.microsoft.com/office/powerpoint/2015/10/main">
+  <p1510:revLst>
+    <p1510:client id="{1F611EC7-DCCE-40BE-9882-3AA59DBCF717}" v="1" dt="2026-09-29T16:05:05.282"/>
+  </p1510:revLst>
+</p1510:revInfo>
+</file>
+
 <file path=ppt/changesInfos/changesInfo1.xml><?xml version="1.0" encoding="utf-8"?>
 <pc:chgInfo xmlns:a="http://schemas.openxmlformats.org/drawingml/2006/main" xmlns:r="http://schemas.openxmlformats.org/officeDocument/2006/relationships" xmlns:ac="http://schemas.microsoft.com/office/drawing/2013/main/command" xmlns:pc="http://schemas.microsoft.com/office/powerpoint/2013/main/command">
   <pc:docChgLst>
     <pc:chgData name="Christopher Smith" userId="f635bcaf-d701-437b-bffd-1a8f160c01d9" providerId="ADAL" clId="{321CF1EA-DDCA-4C73-9872-605BFFD8AB88}"/>
-    <pc:docChg chg="undo custSel addSld delSld modSld">
-      <pc:chgData name="Christopher Smith" userId="f635bcaf-d701-437b-bffd-1a8f160c01d9" providerId="ADAL" clId="{321CF1EA-DDCA-4C73-9872-605BFFD8AB88}" dt="2026-09-13T23:14:24.923" v="1620" actId="478"/>
+    <pc:docChg chg="undo custSel addSld delSld modSld sldOrd">
+      <pc:chgData name="Christopher Smith" userId="f635bcaf-d701-437b-bffd-1a8f160c01d9" providerId="ADAL" clId="{321CF1EA-DDCA-4C73-9872-605BFFD8AB88}" dt="2026-09-29T16:11:40.571" v="1651" actId="20577"/>
       <pc:docMkLst>
         <pc:docMk/>
       </pc:docMkLst>
-      <pc:sldChg chg="addSp delSp modSp mod">
-        <pc:chgData name="Christopher Smith" userId="f635bcaf-d701-437b-bffd-1a8f160c01d9" providerId="ADAL" clId="{321CF1EA-DDCA-4C73-9872-605BFFD8AB88}" dt="2026-09-13T23:14:24.923" v="1620" actId="478"/>
+      <pc:sldChg chg="modSp mod">
+        <pc:chgData name="Christopher Smith" userId="f635bcaf-d701-437b-bffd-1a8f160c01d9" providerId="ADAL" clId="{321CF1EA-DDCA-4C73-9872-605BFFD8AB88}" dt="2026-09-29T16:05:06.022" v="1622" actId="20577"/>
         <pc:sldMkLst>
           <pc:docMk/>
-          <pc:sldMk cId="3196567083" sldId="258"/>
+          <pc:sldMk cId="3196567084" sldId="258"/>
         </pc:sldMkLst>
-        <pc:spChg chg="add del mod">
-          <ac:chgData name="Christopher Smith" userId="f635bcaf-d701-437b-bffd-1a8f160c01d9" providerId="ADAL" clId="{321CF1EA-DDCA-4C73-9872-605BFFD8AB88}" dt="2026-09-13T23:14:24.923" v="1620" actId="478"/>
+        <pc:spChg chg="mod">
+          <ac:chgData name="Christopher Smith" userId="f635bcaf-d701-437b-bffd-1a8f160c01d9" providerId="ADAL" clId="{321CF1EA-DDCA-4C73-9872-605BFFD8AB88}" dt="2026-09-29T16:05:06.022" v="1622" actId="20577"/>
           <ac:spMkLst>
             <pc:docMk/>
-            <pc:sldMk cId="3196567083" sldId="258"/>
-            <ac:spMk id="3" creationId="{ED507706-6F42-E11B-D908-0EABC71B74DF}"/>
+            <pc:sldMk cId="3196567084" sldId="258"/>
+            <ac:spMk id="11" creationId="{3E48FC44-1FA2-4F7A-0A80-59B4E81301D5}"/>
+          </ac:spMkLst>
+        </pc:spChg>
+      </pc:sldChg>
+      <pc:sldChg chg="modSp mod">
+        <pc:chgData name="Christopher Smith" userId="f635bcaf-d701-437b-bffd-1a8f160c01d9" providerId="ADAL" clId="{321CF1EA-DDCA-4C73-9872-605BFFD8AB88}" dt="2026-09-29T16:06:41.504" v="1627" actId="20577"/>
+        <pc:sldMkLst>
+          <pc:docMk/>
+          <pc:sldMk cId="3196567086" sldId="273"/>
+        </pc:sldMkLst>
+        <pc:spChg chg="mod">
+          <ac:chgData name="Christopher Smith" userId="f635bcaf-d701-437b-bffd-1a8f160c01d9" providerId="ADAL" clId="{321CF1EA-DDCA-4C73-9872-605BFFD8AB88}" dt="2026-09-29T16:06:41.504" v="1627" actId="20577"/>
+          <ac:spMkLst>
+            <pc:docMk/>
+            <pc:sldMk cId="3196567086" sldId="273"/>
+            <ac:spMk id="11" creationId="{3E48FC44-1FA2-4F7A-0A80-59B4E81301D5}"/>
+          </ac:spMkLst>
+        </pc:spChg>
+      </pc:sldChg>
+      <pc:sldChg chg="modSp mod">
+        <pc:chgData name="Christopher Smith" userId="f635bcaf-d701-437b-bffd-1a8f160c01d9" providerId="ADAL" clId="{321CF1EA-DDCA-4C73-9872-605BFFD8AB88}" dt="2026-09-29T16:10:42.125" v="1645" actId="20577"/>
+        <pc:sldMkLst>
+          <pc:docMk/>
+          <pc:sldMk cId="3196567087" sldId="274"/>
+        </pc:sldMkLst>
+        <pc:spChg chg="mod">
+          <ac:chgData name="Christopher Smith" userId="f635bcaf-d701-437b-bffd-1a8f160c01d9" providerId="ADAL" clId="{321CF1EA-DDCA-4C73-9872-605BFFD8AB88}" dt="2026-09-29T16:10:42.125" v="1645" actId="20577"/>
+          <ac:spMkLst>
+            <pc:docMk/>
+            <pc:sldMk cId="3196567087" sldId="274"/>
+            <ac:spMk id="3" creationId="{00000000-0000-0000-0000-000000000000}"/>
           </ac:spMkLst>
         </pc:spChg>
         <pc:spChg chg="mod">
-          <ac:chgData name="Christopher Smith" userId="f635bcaf-d701-437b-bffd-1a8f160c01d9" providerId="ADAL" clId="{321CF1EA-DDCA-4C73-9872-605BFFD8AB88}" dt="2026-09-11T20:20:35.782" v="1536" actId="20577"/>
+          <ac:chgData name="Christopher Smith" userId="f635bcaf-d701-437b-bffd-1a8f160c01d9" providerId="ADAL" clId="{321CF1EA-DDCA-4C73-9872-605BFFD8AB88}" dt="2026-09-29T16:06:50.404" v="1628" actId="14100"/>
           <ac:spMkLst>
             <pc:docMk/>
-            <pc:sldMk cId="3196567083" sldId="258"/>
+            <pc:sldMk cId="3196567087" sldId="274"/>
             <ac:spMk id="6" creationId="{77977495-7045-4BEB-B038-AC19B9064EC1}"/>
           </ac:spMkLst>
         </pc:spChg>
         <pc:spChg chg="mod">
-          <ac:chgData name="Christopher Smith" userId="f635bcaf-d701-437b-bffd-1a8f160c01d9" providerId="ADAL" clId="{321CF1EA-DDCA-4C73-9872-605BFFD8AB88}" dt="2026-09-09T13:40:34.540" v="1496" actId="20577"/>
+          <ac:chgData name="Christopher Smith" userId="f635bcaf-d701-437b-bffd-1a8f160c01d9" providerId="ADAL" clId="{321CF1EA-DDCA-4C73-9872-605BFFD8AB88}" dt="2026-09-29T16:08:01.706" v="1630" actId="20577"/>
           <ac:spMkLst>
             <pc:docMk/>
-            <pc:sldMk cId="3196567083" sldId="258"/>
+            <pc:sldMk cId="3196567087" sldId="274"/>
             <ac:spMk id="11" creationId="{3E48FC44-1FA2-4F7A-0A80-59B4E81301D5}"/>
           </ac:spMkLst>
         </pc:spChg>
-        <pc:picChg chg="add del mod">
-          <ac:chgData name="Christopher Smith" userId="f635bcaf-d701-437b-bffd-1a8f160c01d9" providerId="ADAL" clId="{321CF1EA-DDCA-4C73-9872-605BFFD8AB88}" dt="2026-09-13T23:14:24.443" v="1619" actId="22"/>
-          <ac:picMkLst>
-            <pc:docMk/>
-            <pc:sldMk cId="3196567083" sldId="258"/>
-            <ac:picMk id="4" creationId="{A8A6836B-219D-B065-2232-9334EDFB143A}"/>
-          </ac:picMkLst>
-        </pc:picChg>
       </pc:sldChg>
-      <pc:sldChg chg="modSp add mod">
-        <pc:chgData name="Christopher Smith" userId="f635bcaf-d701-437b-bffd-1a8f160c01d9" providerId="ADAL" clId="{321CF1EA-DDCA-4C73-9872-605BFFD8AB88}" dt="2026-09-11T20:20:42.798" v="1540" actId="20577"/>
+      <pc:sldChg chg="modSp mod">
+        <pc:chgData name="Christopher Smith" userId="f635bcaf-d701-437b-bffd-1a8f160c01d9" providerId="ADAL" clId="{321CF1EA-DDCA-4C73-9872-605BFFD8AB88}" dt="2026-09-29T16:06:29.852" v="1626" actId="20577"/>
         <pc:sldMkLst>
           <pc:docMk/>
-          <pc:sldMk cId="4033029874" sldId="273"/>
+          <pc:sldMk cId="3196567085" sldId="276"/>
         </pc:sldMkLst>
         <pc:spChg chg="mod">
-          <ac:chgData name="Christopher Smith" userId="f635bcaf-d701-437b-bffd-1a8f160c01d9" providerId="ADAL" clId="{321CF1EA-DDCA-4C73-9872-605BFFD8AB88}" dt="2026-09-11T20:19:48.214" v="1520" actId="20577"/>
+          <ac:chgData name="Christopher Smith" userId="f635bcaf-d701-437b-bffd-1a8f160c01d9" providerId="ADAL" clId="{321CF1EA-DDCA-4C73-9872-605BFFD8AB88}" dt="2026-09-29T16:06:29.852" v="1626" actId="20577"/>
           <ac:spMkLst>
             <pc:docMk/>
-            <pc:sldMk cId="4033029874" sldId="273"/>
-            <ac:spMk id="3" creationId="{7EE5C48A-9527-1587-CB5D-D2F546B0CF6E}"/>
-          </ac:spMkLst>
-        </pc:spChg>
-        <pc:spChg chg="mod">
-          <ac:chgData name="Christopher Smith" userId="f635bcaf-d701-437b-bffd-1a8f160c01d9" providerId="ADAL" clId="{321CF1EA-DDCA-4C73-9872-605BFFD8AB88}" dt="2026-09-11T20:20:42.798" v="1540" actId="20577"/>
-          <ac:spMkLst>
-            <pc:docMk/>
-            <pc:sldMk cId="4033029874" sldId="273"/>
-            <ac:spMk id="6" creationId="{D8C060DE-8A3F-B6BE-1F69-10A41CD4C92C}"/>
-          </ac:spMkLst>
-        </pc:spChg>
-        <pc:spChg chg="mod">
-          <ac:chgData name="Christopher Smith" userId="f635bcaf-d701-437b-bffd-1a8f160c01d9" providerId="ADAL" clId="{321CF1EA-DDCA-4C73-9872-605BFFD8AB88}" dt="2026-09-09T13:40:46.399" v="1497" actId="1076"/>
-          <ac:spMkLst>
-            <pc:docMk/>
-            <pc:sldMk cId="4033029874" sldId="273"/>
-            <ac:spMk id="11" creationId="{58451ECB-695D-DCAD-7E2A-DEDCD7EC2253}"/>
+            <pc:sldMk cId="3196567085" sldId="276"/>
+            <ac:spMk id="11" creationId="{3E48FC44-1FA2-4F7A-0A80-59B4E81301D5}"/>
           </ac:spMkLst>
         </pc:spChg>
       </pc:sldChg>
-      <pc:sldChg chg="modSp add mod">
-        <pc:chgData name="Christopher Smith" userId="f635bcaf-d701-437b-bffd-1a8f160c01d9" providerId="ADAL" clId="{321CF1EA-DDCA-4C73-9872-605BFFD8AB88}" dt="2026-09-11T20:20:32.230" v="1534" actId="20577"/>
+      <pc:sldChg chg="modSp mod">
+        <pc:chgData name="Christopher Smith" userId="f635bcaf-d701-437b-bffd-1a8f160c01d9" providerId="ADAL" clId="{321CF1EA-DDCA-4C73-9872-605BFFD8AB88}" dt="2026-09-29T16:11:07.737" v="1646" actId="20577"/>
         <pc:sldMkLst>
           <pc:docMk/>
-          <pc:sldMk cId="1945915822" sldId="274"/>
+          <pc:sldMk cId="3196567089" sldId="277"/>
         </pc:sldMkLst>
         <pc:spChg chg="mod">
-          <ac:chgData name="Christopher Smith" userId="f635bcaf-d701-437b-bffd-1a8f160c01d9" providerId="ADAL" clId="{321CF1EA-DDCA-4C73-9872-605BFFD8AB88}" dt="2026-09-11T20:20:17.638" v="1532" actId="20577"/>
+          <ac:chgData name="Christopher Smith" userId="f635bcaf-d701-437b-bffd-1a8f160c01d9" providerId="ADAL" clId="{321CF1EA-DDCA-4C73-9872-605BFFD8AB88}" dt="2026-09-29T16:11:07.737" v="1646" actId="20577"/>
           <ac:spMkLst>
             <pc:docMk/>
-            <pc:sldMk cId="1945915822" sldId="274"/>
-            <ac:spMk id="3" creationId="{18C37920-CDEE-2514-B915-30068AACC242}"/>
-          </ac:spMkLst>
-        </pc:spChg>
-        <pc:spChg chg="mod">
-          <ac:chgData name="Christopher Smith" userId="f635bcaf-d701-437b-bffd-1a8f160c01d9" providerId="ADAL" clId="{321CF1EA-DDCA-4C73-9872-605BFFD8AB88}" dt="2026-09-11T20:20:32.230" v="1534" actId="20577"/>
-          <ac:spMkLst>
-            <pc:docMk/>
-            <pc:sldMk cId="1945915822" sldId="274"/>
-            <ac:spMk id="6" creationId="{3B572C6B-73AA-DC27-8725-BC31C98D41A5}"/>
-          </ac:spMkLst>
-        </pc:spChg>
-        <pc:spChg chg="mod">
-          <ac:chgData name="Christopher Smith" userId="f635bcaf-d701-437b-bffd-1a8f160c01d9" providerId="ADAL" clId="{321CF1EA-DDCA-4C73-9872-605BFFD8AB88}" dt="2026-09-08T22:16:45.481" v="1036"/>
-          <ac:spMkLst>
-            <pc:docMk/>
-            <pc:sldMk cId="1945915822" sldId="274"/>
-            <ac:spMk id="11" creationId="{88351F3F-5752-69F6-9538-D292669878BE}"/>
-          </ac:spMkLst>
-        </pc:spChg>
-        <pc:spChg chg="mod">
-          <ac:chgData name="Christopher Smith" userId="f635bcaf-d701-437b-bffd-1a8f160c01d9" providerId="ADAL" clId="{321CF1EA-DDCA-4C73-9872-605BFFD8AB88}" dt="2026-09-08T22:17:51.562" v="1144" actId="20577"/>
-          <ac:spMkLst>
-            <pc:docMk/>
-            <pc:sldMk cId="1945915822" sldId="274"/>
-            <ac:spMk id="12" creationId="{3ACA1447-8728-1184-29E2-3464F249A700}"/>
+            <pc:sldMk cId="3196567089" sldId="277"/>
+            <ac:spMk id="3" creationId="{00000000-0000-0000-0000-000000000000}"/>
           </ac:spMkLst>
         </pc:spChg>
       </pc:sldChg>
-      <pc:sldChg chg="delSp modSp add mod">
-        <pc:chgData name="Christopher Smith" userId="f635bcaf-d701-437b-bffd-1a8f160c01d9" providerId="ADAL" clId="{321CF1EA-DDCA-4C73-9872-605BFFD8AB88}" dt="2026-09-11T20:21:32.510" v="1612" actId="20577"/>
+      <pc:sldChg chg="modSp mod">
+        <pc:chgData name="Christopher Smith" userId="f635bcaf-d701-437b-bffd-1a8f160c01d9" providerId="ADAL" clId="{321CF1EA-DDCA-4C73-9872-605BFFD8AB88}" dt="2026-09-29T16:11:33.910" v="1649" actId="20577"/>
         <pc:sldMkLst>
           <pc:docMk/>
-          <pc:sldMk cId="3803463582" sldId="275"/>
+          <pc:sldMk cId="3196567090" sldId="278"/>
         </pc:sldMkLst>
         <pc:spChg chg="mod">
-          <ac:chgData name="Christopher Smith" userId="f635bcaf-d701-437b-bffd-1a8f160c01d9" providerId="ADAL" clId="{321CF1EA-DDCA-4C73-9872-605BFFD8AB88}" dt="2026-09-11T20:21:32.510" v="1612" actId="20577"/>
+          <ac:chgData name="Christopher Smith" userId="f635bcaf-d701-437b-bffd-1a8f160c01d9" providerId="ADAL" clId="{321CF1EA-DDCA-4C73-9872-605BFFD8AB88}" dt="2026-09-29T16:11:33.910" v="1649" actId="20577"/>
           <ac:spMkLst>
             <pc:docMk/>
-            <pc:sldMk cId="3803463582" sldId="275"/>
-            <ac:spMk id="3" creationId="{D34BE1B3-91E6-8A2F-68C4-6858BB53668C}"/>
-          </ac:spMkLst>
-        </pc:spChg>
-        <pc:spChg chg="mod">
-          <ac:chgData name="Christopher Smith" userId="f635bcaf-d701-437b-bffd-1a8f160c01d9" providerId="ADAL" clId="{321CF1EA-DDCA-4C73-9872-605BFFD8AB88}" dt="2026-09-08T22:17:09.983" v="1066" actId="27636"/>
-          <ac:spMkLst>
-            <pc:docMk/>
-            <pc:sldMk cId="3803463582" sldId="275"/>
-            <ac:spMk id="6" creationId="{952B8E5A-8181-1590-5580-E925766C154A}"/>
-          </ac:spMkLst>
-        </pc:spChg>
-        <pc:spChg chg="mod">
-          <ac:chgData name="Christopher Smith" userId="f635bcaf-d701-437b-bffd-1a8f160c01d9" providerId="ADAL" clId="{321CF1EA-DDCA-4C73-9872-605BFFD8AB88}" dt="2026-09-08T22:18:41.321" v="1159" actId="20577"/>
-          <ac:spMkLst>
-            <pc:docMk/>
-            <pc:sldMk cId="3803463582" sldId="275"/>
-            <ac:spMk id="11" creationId="{37D97EBE-2CC4-2AEF-5E63-2C1BEB89A7B9}"/>
+            <pc:sldMk cId="3196567090" sldId="278"/>
+            <ac:spMk id="3" creationId="{00000000-0000-0000-0000-000000000000}"/>
           </ac:spMkLst>
         </pc:spChg>
       </pc:sldChg>
-      <pc:sldChg chg="addSp delSp modSp add mod">
-        <pc:chgData name="Christopher Smith" userId="f635bcaf-d701-437b-bffd-1a8f160c01d9" providerId="ADAL" clId="{321CF1EA-DDCA-4C73-9872-605BFFD8AB88}" dt="2026-09-11T20:20:39.133" v="1538" actId="20577"/>
+      <pc:sldChg chg="modSp mod ord">
+        <pc:chgData name="Christopher Smith" userId="f635bcaf-d701-437b-bffd-1a8f160c01d9" providerId="ADAL" clId="{321CF1EA-DDCA-4C73-9872-605BFFD8AB88}" dt="2026-09-29T16:11:40.571" v="1651" actId="20577"/>
         <pc:sldMkLst>
           <pc:docMk/>
-          <pc:sldMk cId="72989767" sldId="276"/>
+          <pc:sldMk cId="3196567091" sldId="279"/>
         </pc:sldMkLst>
         <pc:spChg chg="mod">
-          <ac:chgData name="Christopher Smith" userId="f635bcaf-d701-437b-bffd-1a8f160c01d9" providerId="ADAL" clId="{321CF1EA-DDCA-4C73-9872-605BFFD8AB88}" dt="2026-09-09T13:38:18.986" v="1445" actId="20577"/>
+          <ac:chgData name="Christopher Smith" userId="f635bcaf-d701-437b-bffd-1a8f160c01d9" providerId="ADAL" clId="{321CF1EA-DDCA-4C73-9872-605BFFD8AB88}" dt="2026-09-29T16:11:40.571" v="1651" actId="20577"/>
           <ac:spMkLst>
             <pc:docMk/>
-            <pc:sldMk cId="72989767" sldId="276"/>
-            <ac:spMk id="3" creationId="{CCCB3394-C44A-7574-6284-F079751AEFC1}"/>
-          </ac:spMkLst>
-        </pc:spChg>
-        <pc:spChg chg="add mod">
-          <ac:chgData name="Christopher Smith" userId="f635bcaf-d701-437b-bffd-1a8f160c01d9" providerId="ADAL" clId="{321CF1EA-DDCA-4C73-9872-605BFFD8AB88}" dt="2026-09-09T13:36:16.546" v="1328" actId="1035"/>
-          <ac:spMkLst>
-            <pc:docMk/>
-            <pc:sldMk cId="72989767" sldId="276"/>
-            <ac:spMk id="4" creationId="{63221CCC-54C2-4639-24CB-F9975FB54705}"/>
-          </ac:spMkLst>
-        </pc:spChg>
-        <pc:spChg chg="mod">
-          <ac:chgData name="Christopher Smith" userId="f635bcaf-d701-437b-bffd-1a8f160c01d9" providerId="ADAL" clId="{321CF1EA-DDCA-4C73-9872-605BFFD8AB88}" dt="2026-09-11T20:20:39.133" v="1538" actId="20577"/>
-          <ac:spMkLst>
-            <pc:docMk/>
-            <pc:sldMk cId="72989767" sldId="276"/>
-            <ac:spMk id="6" creationId="{2A0E8101-6FD3-9312-509E-3ACCFF9CD6B5}"/>
+            <pc:sldMk cId="3196567091" sldId="279"/>
+            <ac:spMk id="3" creationId="{00000000-0000-0000-0000-000000000000}"/>
           </ac:spMkLst>
         </pc:spChg>
       </pc:sldChg>
@@ -455,7 +413,7 @@
           <a:p>
             <a:fld id="{2F3E8B1C-86EF-43CF-8304-249481088644}" type="datetimeFigureOut">
               <a:rPr lang="en-US" smtClean="0"/>
-              <a:t>9/11/2026</a:t>
+              <a:t>9/29/2026</a:t>
             </a:fld>
             <a:endParaRPr lang="en-US"/>
           </a:p>
@@ -653,7 +611,7 @@
           <a:p>
             <a:fld id="{2F3E8B1C-86EF-43CF-8304-249481088644}" type="datetimeFigureOut">
               <a:rPr lang="en-US" smtClean="0"/>
-              <a:t>9/11/2026</a:t>
+              <a:t>9/29/2026</a:t>
             </a:fld>
             <a:endParaRPr lang="en-US"/>
           </a:p>
@@ -861,7 +819,7 @@
           <a:p>
             <a:fld id="{2F3E8B1C-86EF-43CF-8304-249481088644}" type="datetimeFigureOut">
               <a:rPr lang="en-US" smtClean="0"/>
-              <a:t>9/11/2026</a:t>
+              <a:t>9/29/2026</a:t>
             </a:fld>
             <a:endParaRPr lang="en-US"/>
           </a:p>
@@ -1059,7 +1017,7 @@
           <a:p>
             <a:fld id="{2F3E8B1C-86EF-43CF-8304-249481088644}" type="datetimeFigureOut">
               <a:rPr lang="en-US" smtClean="0"/>
-              <a:t>9/11/2026</a:t>
+              <a:t>9/29/2026</a:t>
             </a:fld>
             <a:endParaRPr lang="en-US"/>
           </a:p>
@@ -1334,7 +1292,7 @@
           <a:p>
             <a:fld id="{2F3E8B1C-86EF-43CF-8304-249481088644}" type="datetimeFigureOut">
               <a:rPr lang="en-US" smtClean="0"/>
-              <a:t>9/11/2026</a:t>
+              <a:t>9/29/2026</a:t>
             </a:fld>
             <a:endParaRPr lang="en-US"/>
           </a:p>
@@ -1604,7 +1562,7 @@
           <a:p>
             <a:fld id="{2F3E8B1C-86EF-43CF-8304-249481088644}" type="datetimeFigureOut">
               <a:rPr lang="en-US" smtClean="0"/>
-              <a:t>9/11/2026</a:t>
+              <a:t>9/29/2026</a:t>
             </a:fld>
             <a:endParaRPr lang="en-US"/>
           </a:p>
@@ -2024,7 +1982,7 @@
           <a:p>
             <a:fld id="{2F3E8B1C-86EF-43CF-8304-249481088644}" type="datetimeFigureOut">
               <a:rPr lang="en-US" smtClean="0"/>
-              <a:t>9/11/2026</a:t>
+              <a:t>9/29/2026</a:t>
             </a:fld>
             <a:endParaRPr lang="en-US"/>
           </a:p>
@@ -2165,7 +2123,7 @@
           <a:p>
             <a:fld id="{2F3E8B1C-86EF-43CF-8304-249481088644}" type="datetimeFigureOut">
               <a:rPr lang="en-US" smtClean="0"/>
-              <a:t>9/11/2026</a:t>
+              <a:t>9/29/2026</a:t>
             </a:fld>
             <a:endParaRPr lang="en-US"/>
           </a:p>
@@ -2278,7 +2236,7 @@
           <a:p>
             <a:fld id="{2F3E8B1C-86EF-43CF-8304-249481088644}" type="datetimeFigureOut">
               <a:rPr lang="en-US" smtClean="0"/>
-              <a:t>9/11/2026</a:t>
+              <a:t>9/29/2026</a:t>
             </a:fld>
             <a:endParaRPr lang="en-US"/>
           </a:p>
@@ -2589,7 +2547,7 @@
           <a:p>
             <a:fld id="{2F3E8B1C-86EF-43CF-8304-249481088644}" type="datetimeFigureOut">
               <a:rPr lang="en-US" smtClean="0"/>
-              <a:t>9/11/2026</a:t>
+              <a:t>9/29/2026</a:t>
             </a:fld>
             <a:endParaRPr lang="en-US"/>
           </a:p>
@@ -2877,7 +2835,7 @@
           <a:p>
             <a:fld id="{2F3E8B1C-86EF-43CF-8304-249481088644}" type="datetimeFigureOut">
               <a:rPr lang="en-US" smtClean="0"/>
-              <a:t>9/11/2026</a:t>
+              <a:t>9/29/2026</a:t>
             </a:fld>
             <a:endParaRPr lang="en-US"/>
           </a:p>
@@ -3118,7 +3076,7 @@
             <a:fld id="{2F3E8B1C-86EF-43CF-8304-249481088644}" type="datetimeFigureOut">
               <a:rPr lang="en-US" smtClean="0"/>
               <a:pPr/>
-              <a:t>9/11/2026</a:t>
+              <a:t>9/29/2026</a:t>
             </a:fld>
             <a:endParaRPr lang="en-US" dirty="0"/>
           </a:p>
@@ -3688,7 +3646,7 @@
         <p:spPr>
           <a:xfrm>
             <a:off x="700331" y="2150000"/>
-            <a:ext cx="5700000" cy="3200000"/>
+            <a:ext cx="5700000" cy="2308324"/>
           </a:xfrm>
           <a:prstGeom prst="rect">
             <a:avLst/>
@@ -3705,7 +3663,7 @@
               <a:rPr lang="en-US" sz="1600" i="1" dirty="0">
                 <a:latin typeface="Abadi Extra Light" panose="020B0604020202020204" pitchFamily="34" charset="0"/>
               </a:rPr>
-              <a:t>Use this space to describe the cumulative growth of Divvy's systemwide ridership since its launch on June 27, 2013. How many trips have been logged on the Divvy system since its initial rollout? On what date did the system surpass 10 million trips? How long did it take for the system to log 20, 30, 40 and 50 million trips? Has the pace of growth sped up or slowed down over time? Consider whether things like system expansions, e-bikes, pricing or the COVID-19 pandemic might help explain the pattern you observe.</a:t>
+              <a:t>Use this space to describe the cumulative growth of Divvy's systemwide ridership since its launch on June 27, 2013. How many trips have been logged on the Divvy system since its initial rollout? On what date did the system surpass 10 million trips? What does the spacing between the vertical lines suggest about whether the pace of growth has sped up or slowed down over time? Has the pace of growth sped up or slowed down over time? Consider whether things like system expansions, e-bikes, pricing or the COVID-19 pandemic might help explain the pattern you observe.</a:t>
             </a:r>
           </a:p>
         </p:txBody>
@@ -3849,8 +3807,9 @@
           <a:p>
             <a:fld id="{C3DB2ADC-AF19-4574-8C10-79B5B04FCA27}" type="slidenum">
               <a:rPr lang="en-US" sz="1050"/>
-              <a:t>‹#›</a:t>
+              <a:t>1</a:t>
             </a:fld>
+            <a:endParaRPr lang="en-US" sz="1050"/>
           </a:p>
         </p:txBody>
       </p:sp>
@@ -3953,7 +3912,7 @@
         <p:spPr>
           <a:xfrm>
             <a:off x="700331" y="2150000"/>
-            <a:ext cx="5700000" cy="3200000"/>
+            <a:ext cx="5700000" cy="1815882"/>
           </a:xfrm>
           <a:prstGeom prst="rect">
             <a:avLst/>
@@ -3970,7 +3929,7 @@
               <a:rPr lang="en-US" sz="1600" i="1" dirty="0">
                 <a:latin typeface="Abadi Extra Light" panose="020B0604020202020204" pitchFamily="34" charset="0"/>
               </a:rPr>
-              <a:t>Note any patterns and/or variations you see in monthly ridership. How does ridership in winter months (December to February) compare with the rest of the year? What factors do you feel explain differences in ridership by month? What other non-seasonal factors do you feel may have influenced ridership? Consider whether things like system expansions, the introduction of e-bikes, pricing changes or the COVID-19 pandemic might have played a role. Support your findings by referencing statistics from the figure.</a:t>
+              <a:t>Note any patterns and/or variations you see in monthly ridership. How does ridership in winter months (December to February) compare with the rest of the year? What factors do you feel explain differences in ridership by month? What other non-seasonal factors do you feel may have influenced ridership? Consider whether things like system expansions, the introduction of e-bikes might have played a role.</a:t>
             </a:r>
           </a:p>
         </p:txBody>
@@ -4114,8 +4073,9 @@
           <a:p>
             <a:fld id="{C3DB2ADC-AF19-4574-8C10-79B5B04FCA27}" type="slidenum">
               <a:rPr lang="en-US" sz="1050"/>
-              <a:t>‹#›</a:t>
+              <a:t>2</a:t>
             </a:fld>
+            <a:endParaRPr lang="en-US" sz="1050"/>
           </a:p>
         </p:txBody>
       </p:sp>
@@ -4218,7 +4178,7 @@
         <p:spPr>
           <a:xfrm>
             <a:off x="700331" y="2150000"/>
-            <a:ext cx="5700000" cy="3200000"/>
+            <a:ext cx="5700000" cy="1815882"/>
           </a:xfrm>
           <a:prstGeom prst="rect">
             <a:avLst/>
@@ -4235,7 +4195,7 @@
               <a:rPr lang="en-US" sz="1600" i="1" dirty="0">
                 <a:latin typeface="Abadi Extra Light" panose="020B0604020202020204" pitchFamily="34" charset="0"/>
               </a:rPr>
-              <a:t>Note any patterns and/or variations you see in daily ridership (Figure 3). How does weekend ridership compare with weekday ridership, and what factors do you feel explain daily differences? Next, note any trends or seasonal patterns in average trip duration (Figure 4). Have trips become shorter or longer over time? What factors, such as e-bikes, pricing, membership or weather, might explain the changes? Support your findings by referencing statistics from the figures.</a:t>
+              <a:t>Note any patterns and/or variations you see in daily ridership (Figure 3). How does weekend ridership compare with weekday ridership, and what factors do you feel explain daily differences? Next, note any trends or seasonal patterns in average trip duration (Figure 4). Have trips become shorter or longer over time? What factors, such as pricing, membership or weather, might explain the changes?</a:t>
             </a:r>
           </a:p>
         </p:txBody>
@@ -4443,8 +4403,9 @@
           <a:p>
             <a:fld id="{C3DB2ADC-AF19-4574-8C10-79B5B04FCA27}" type="slidenum">
               <a:rPr lang="en-US" sz="1050"/>
-              <a:t>‹#›</a:t>
+              <a:t>3</a:t>
             </a:fld>
+            <a:endParaRPr lang="en-US" sz="1050"/>
           </a:p>
         </p:txBody>
       </p:sp>
@@ -4496,8 +4457,8 @@
         </p:nvSpPr>
         <p:spPr>
           <a:xfrm>
-            <a:off x="669852" y="870596"/>
-            <a:ext cx="5426148" cy="577205"/>
+            <a:off x="669851" y="870596"/>
+            <a:ext cx="6212641" cy="577205"/>
           </a:xfrm>
         </p:spPr>
         <p:txBody>
@@ -4547,7 +4508,7 @@
         <p:spPr>
           <a:xfrm>
             <a:off x="700331" y="2150000"/>
-            <a:ext cx="5700000" cy="3200000"/>
+            <a:ext cx="5700000" cy="2062103"/>
           </a:xfrm>
           <a:prstGeom prst="rect">
             <a:avLst/>
@@ -4564,7 +4525,7 @@
               <a:rPr lang="en-US" sz="1600" i="1" dirty="0">
                 <a:latin typeface="Abadi Extra Light" panose="020B0604020202020204" pitchFamily="34" charset="0"/>
               </a:rPr>
-              <a:t>Note any patterns and/or variations you see in total ridership by community area. Which community areas logged the most and fewest trips, and where are they located? Does the picture change when you compare average daily trips and trips standardized by population? What factors do you feel explain differences in total and daily ridership? Consider things like population and job density, proximity to downtown and the lakefront, and how long stations have been in place. Support your findings by referencing statistics from the figure.</a:t>
+              <a:t>Note any patterns and/or variations you see in total ridership by community area. Which community areas logged the most and fewest trips, and where are they located? Does the picture change when you compare average daily trips and trips standardized by population? What factors do you feel explain differences in total and daily ridership? Consider things like population and job density, proximity to downtown and the lakefront, and how long stations have been in place.</a:t>
             </a:r>
           </a:p>
         </p:txBody>
@@ -4647,7 +4608,7 @@
             <a:pPr algn="ctr"/>
             <a:r>
               <a:rPr lang="en-US" dirty="0"/>
-              <a:t>Insert total Divvy trips by community area map (Figure 5)</a:t>
+              <a:t>Insert average daily Divvy trips by community area map (Figure 5)</a:t>
             </a:r>
             <a:br>
               <a:rPr lang="en-US" dirty="0"/>
@@ -4708,8 +4669,9 @@
           <a:p>
             <a:fld id="{C3DB2ADC-AF19-4574-8C10-79B5B04FCA27}" type="slidenum">
               <a:rPr lang="en-US" sz="1050"/>
-              <a:t>‹#›</a:t>
+              <a:t>4</a:t>
             </a:fld>
+            <a:endParaRPr lang="en-US" sz="1050"/>
           </a:p>
         </p:txBody>
       </p:sp>
@@ -4973,8 +4935,9 @@
           <a:p>
             <a:fld id="{C3DB2ADC-AF19-4574-8C10-79B5B04FCA27}" type="slidenum">
               <a:rPr lang="en-US" sz="1050"/>
-              <a:t>‹#›</a:t>
+              <a:t>5</a:t>
             </a:fld>
+            <a:endParaRPr lang="en-US" sz="1050"/>
           </a:p>
         </p:txBody>
       </p:sp>
@@ -5177,7 +5140,7 @@
             <a:pPr algn="ctr"/>
             <a:r>
               <a:rPr lang="en-US" dirty="0"/>
-              <a:t>Insert custom plot of monthly trips per 1,000 residents by quintile (Figure 7)</a:t>
+              <a:t>Insert custom plot of monthly trips per 10,000 residents by quintile (Figure 7)</a:t>
             </a:r>
             <a:br>
               <a:rPr lang="en-US" dirty="0"/>
@@ -5288,8 +5251,9 @@
           <a:p>
             <a:fld id="{C3DB2ADC-AF19-4574-8C10-79B5B04FCA27}" type="slidenum">
               <a:rPr lang="en-US" sz="1050"/>
-              <a:t>‹#›</a:t>
+              <a:t>6</a:t>
             </a:fld>
+            <a:endParaRPr lang="en-US" sz="1050"/>
           </a:p>
         </p:txBody>
       </p:sp>
@@ -5358,7 +5322,7 @@
             </a:pPr>
             <a:r>
               <a:rPr lang="en-US" sz="3400" dirty="0"/>
-              <a:t>MONTHLY DIVVY TRIPS</a:t>
+              <a:t>AVERAGE TRIP DURATION</a:t>
             </a:r>
             <a:br>
               <a:rPr lang="en-US" sz="3400" dirty="0"/>
@@ -5409,7 +5373,7 @@
               <a:rPr lang="en-US" sz="1600" i="1" dirty="0">
                 <a:latin typeface="Abadi Extra Light" panose="020B0604020202020204" pitchFamily="34" charset="0"/>
               </a:rPr>
-              <a:t>Describe how ridership has changed over time in each of your five selected community areas (one from each quintile category). Do the trends differ across socioeconomic categories? When did trips begin in each community area, and how have seasonal peaks changed over the years? Consider whether things like when stations were installed, system expansions or local land use might help explain the differences you observe.</a:t>
+              <a:t>How do trip durations compare across the five community areas? Compare the medians and the spread (interquartile range) of each box. Which community areas have the most outliers, and what might explain them? What might explain the differences between community areas? Consider things like distance to common destinations, trip purpose (commuting versus recreation), rider type (member or casual), winter ridership or how recently stations were installed.</a:t>
             </a:r>
           </a:p>
         </p:txBody>
@@ -5492,7 +5456,18 @@
             <a:pPr algn="ctr"/>
             <a:r>
               <a:rPr lang="en-US" dirty="0"/>
-              <a:t>Insert custom plot of monthly trips for selected community areas (Figure 8)</a:t>
+              <a:t>Insert custom trip duration box plot for selected community areas </a:t>
+            </a:r>
+            <a:br>
+              <a:rPr lang="en-US" dirty="0"/>
+            </a:br>
+            <a:r>
+              <a:rPr lang="en-US" dirty="0"/>
+              <a:t>(</a:t>
+            </a:r>
+            <a:r>
+              <a:rPr lang="en-US"/>
+              <a:t>Figure 8)</a:t>
             </a:r>
             <a:br>
               <a:rPr lang="en-US" dirty="0"/>
@@ -5553,15 +5528,16 @@
           <a:p>
             <a:fld id="{C3DB2ADC-AF19-4574-8C10-79B5B04FCA27}" type="slidenum">
               <a:rPr lang="en-US" sz="1050"/>
-              <a:t>‹#›</a:t>
+              <a:t>7</a:t>
             </a:fld>
+            <a:endParaRPr lang="en-US" sz="1050"/>
           </a:p>
         </p:txBody>
       </p:sp>
     </p:spTree>
     <p:extLst>
       <p:ext uri="{BB962C8B-B14F-4D97-AF65-F5344CB8AC3E}">
-        <p14:creationId xmlns:p14="http://schemas.microsoft.com/office/powerpoint/2010/main" val="3196567090"/>
+        <p14:creationId xmlns:p14="http://schemas.microsoft.com/office/powerpoint/2010/main" val="3196567091"/>
       </p:ext>
     </p:extLst>
   </p:cSld>
@@ -5623,7 +5599,7 @@
             </a:pPr>
             <a:r>
               <a:rPr lang="en-US" sz="3400" dirty="0"/>
-              <a:t>AVERAGE TRIP DURATION</a:t>
+              <a:t>MONTHLY DIVVY TRIPS</a:t>
             </a:r>
             <a:br>
               <a:rPr lang="en-US" sz="3400" dirty="0"/>
@@ -5674,7 +5650,7 @@
               <a:rPr lang="en-US" sz="1600" i="1" dirty="0">
                 <a:latin typeface="Abadi Extra Light" panose="020B0604020202020204" pitchFamily="34" charset="0"/>
               </a:rPr>
-              <a:t>How do trip durations compare across the five community areas? Compare the medians and the spread (interquartile range) of each box. Which community areas have the most outliers, and what might explain them? What might explain the differences between community areas? Consider things like distance to common destinations, trip purpose (commuting versus recreation), rider type (member or casual), winter ridership or how recently stations were installed.</a:t>
+              <a:t>Describe how ridership has changed over time in each of your five selected community areas (one from each quintile category). Do the trends differ across socioeconomic categories? When did trips begin in each community area, and how have seasonal peaks changed over the years? Consider whether things like when stations were installed, system expansions or local land use might help explain the differences you observe.</a:t>
             </a:r>
           </a:p>
         </p:txBody>
@@ -5757,7 +5733,7 @@
             <a:pPr algn="ctr"/>
             <a:r>
               <a:rPr lang="en-US" dirty="0"/>
-              <a:t>Insert custom trip duration box plot for selected community areas (Figure 9)</a:t>
+              <a:t>Insert custom plot of monthly trips for selected community areas (Figure 9)</a:t>
             </a:r>
             <a:br>
               <a:rPr lang="en-US" dirty="0"/>
@@ -5818,15 +5794,16 @@
           <a:p>
             <a:fld id="{C3DB2ADC-AF19-4574-8C10-79B5B04FCA27}" type="slidenum">
               <a:rPr lang="en-US" sz="1050"/>
-              <a:t>‹#›</a:t>
+              <a:t>8</a:t>
             </a:fld>
+            <a:endParaRPr lang="en-US" sz="1050"/>
           </a:p>
         </p:txBody>
       </p:sp>
     </p:spTree>
     <p:extLst>
       <p:ext uri="{BB962C8B-B14F-4D97-AF65-F5344CB8AC3E}">
-        <p14:creationId xmlns:p14="http://schemas.microsoft.com/office/powerpoint/2010/main" val="3196567091"/>
+        <p14:creationId xmlns:p14="http://schemas.microsoft.com/office/powerpoint/2010/main" val="3196567090"/>
       </p:ext>
     </p:extLst>
   </p:cSld>
